--- a/docs/content/mapping/mapping_lecture.pptx
+++ b/docs/content/mapping/mapping_lecture.pptx
@@ -3366,7 +3366,7 @@
             </a:pPr>
             <a:r>
               <a:rPr/>
-              <a:t>2026-09-04</a:t>
+              <a:t>2026-09-08</a:t>
             </a:r>
           </a:p>
         </p:txBody>

--- a/docs/content/mapping/mapping_lecture.pptx
+++ b/docs/content/mapping/mapping_lecture.pptx
@@ -3366,7 +3366,7 @@
             </a:pPr>
             <a:r>
               <a:rPr/>
-              <a:t>2026-09-08</a:t>
+              <a:t>2026-09-10</a:t>
             </a:r>
           </a:p>
         </p:txBody>

--- a/docs/content/mapping/mapping_lecture.pptx
+++ b/docs/content/mapping/mapping_lecture.pptx
@@ -3366,7 +3366,7 @@
             </a:pPr>
             <a:r>
               <a:rPr/>
-              <a:t>2026-09-10</a:t>
+              <a:t>2026-09-14</a:t>
             </a:r>
           </a:p>
         </p:txBody>

--- a/docs/content/mapping/mapping_lecture.pptx
+++ b/docs/content/mapping/mapping_lecture.pptx
@@ -3366,7 +3366,7 @@
             </a:pPr>
             <a:r>
               <a:rPr/>
-              <a:t>2026-09-14</a:t>
+              <a:t>2026-09-21</a:t>
             </a:r>
           </a:p>
         </p:txBody>

--- a/docs/content/mapping/mapping_lecture.pptx
+++ b/docs/content/mapping/mapping_lecture.pptx
@@ -3366,7 +3366,7 @@
             </a:pPr>
             <a:r>
               <a:rPr/>
-              <a:t>2026-09-21</a:t>
+              <a:t>2026-09-22</a:t>
             </a:r>
           </a:p>
         </p:txBody>

--- a/docs/content/mapping/mapping_lecture.pptx
+++ b/docs/content/mapping/mapping_lecture.pptx
@@ -3366,7 +3366,7 @@
             </a:pPr>
             <a:r>
               <a:rPr/>
-              <a:t>2026-09-22</a:t>
+              <a:t>2026-09-23</a:t>
             </a:r>
           </a:p>
         </p:txBody>

--- a/docs/content/mapping/mapping_lecture.pptx
+++ b/docs/content/mapping/mapping_lecture.pptx
@@ -6325,6 +6325,25 @@
             <a:r>
               <a:rPr>
                 <a:solidFill>
+                  <a:srgbClr val="5E5E5E"/>
+                </a:solidFill>
+                <a:latin typeface="Courier"/>
+              </a:rPr>
+              <a:t># "Washington" vs "washington"</a:t>
+            </a:r>
+            <a:br/>
+            <a:r>
+              <a:rPr>
+                <a:solidFill>
+                  <a:srgbClr val="003B4F"/>
+                </a:solidFill>
+                <a:latin typeface="Courier"/>
+              </a:rPr>
+              <a:t>  </a:t>
+            </a:r>
+            <a:r>
+              <a:rPr>
+                <a:solidFill>
                   <a:srgbClr val="4758AB"/>
                 </a:solidFill>
                 <a:latin typeface="Courier"/>
@@ -6392,16 +6411,7 @@
                 </a:solidFill>
                 <a:latin typeface="Courier"/>
               </a:rPr>
-              <a:t>)  </a:t>
-            </a:r>
-            <a:r>
-              <a:rPr>
-                <a:solidFill>
-                  <a:srgbClr val="5E5E5E"/>
-                </a:solidFill>
-                <a:latin typeface="Courier"/>
-              </a:rPr>
-              <a:t># "Washington" vs "washington"</a:t>
+              <a:t>)</a:t>
             </a:r>
           </a:p>
           <a:p>
@@ -6670,6 +6680,25 @@
             <a:r>
               <a:rPr>
                 <a:solidFill>
+                  <a:srgbClr val="5E5E5E"/>
+                </a:solidFill>
+                <a:latin typeface="Courier"/>
+              </a:rPr>
+              <a:t># drop ":north" etc.</a:t>
+            </a:r>
+            <a:br/>
+            <a:r>
+              <a:rPr>
+                <a:solidFill>
+                  <a:srgbClr val="003B4F"/>
+                </a:solidFill>
+                <a:latin typeface="Courier"/>
+              </a:rPr>
+              <a:t>  </a:t>
+            </a:r>
+            <a:r>
+              <a:rPr>
+                <a:solidFill>
                   <a:srgbClr val="4758AB"/>
                 </a:solidFill>
                 <a:latin typeface="Courier"/>
@@ -6747,24 +6776,6 @@
                 <a:latin typeface="Courier"/>
               </a:rPr>
               <a:t>%&gt;%</a:t>
-            </a:r>
-            <a:r>
-              <a:rPr>
-                <a:solidFill>
-                  <a:srgbClr val="003B4F"/>
-                </a:solidFill>
-                <a:latin typeface="Courier"/>
-              </a:rPr>
-              <a:t>   </a:t>
-            </a:r>
-            <a:r>
-              <a:rPr>
-                <a:solidFill>
-                  <a:srgbClr val="5E5E5E"/>
-                </a:solidFill>
-                <a:latin typeface="Courier"/>
-              </a:rPr>
-              <a:t># drop ":north" etc.</a:t>
             </a:r>
             <a:br/>
             <a:r>
@@ -7148,7 +7159,17 @@
                 </a:solidFill>
                 <a:latin typeface="Courier"/>
               </a:rPr>
-              <a:t>, </a:t>
+              <a:t>,</a:t>
+            </a:r>
+            <a:br/>
+            <a:r>
+              <a:rPr>
+                <a:solidFill>
+                  <a:srgbClr val="003B4F"/>
+                </a:solidFill>
+                <a:latin typeface="Courier"/>
+              </a:rPr>
+              <a:t>       </a:t>
             </a:r>
             <a:r>
               <a:rPr>
@@ -10596,14 +10617,15 @@
               </a:rPr>
               <a:t>%&gt;%</a:t>
             </a:r>
-            <a:r>
-              <a:rPr>
-                <a:solidFill>
-                  <a:srgbClr val="003B4F"/>
-                </a:solidFill>
-                <a:latin typeface="Courier"/>
-              </a:rPr>
-              <a:t> </a:t>
+            <a:br/>
+            <a:r>
+              <a:rPr>
+                <a:solidFill>
+                  <a:srgbClr val="003B4F"/>
+                </a:solidFill>
+                <a:latin typeface="Courier"/>
+              </a:rPr>
+              <a:t>  </a:t>
             </a:r>
             <a:r>
               <a:rPr>
@@ -10632,14 +10654,15 @@
               </a:rPr>
               <a:t>%&gt;%</a:t>
             </a:r>
-            <a:r>
-              <a:rPr>
-                <a:solidFill>
-                  <a:srgbClr val="003B4F"/>
-                </a:solidFill>
-                <a:latin typeface="Courier"/>
-              </a:rPr>
-              <a:t> </a:t>
+            <a:br/>
+            <a:r>
+              <a:rPr>
+                <a:solidFill>
+                  <a:srgbClr val="003B4F"/>
+                </a:solidFill>
+                <a:latin typeface="Courier"/>
+              </a:rPr>
+              <a:t>  </a:t>
             </a:r>
             <a:r>
               <a:rPr>
@@ -10669,14 +10692,14 @@
                 <a:latin typeface="Courier"/>
               </a:rPr>
               <a:t># A tibble: 6 × 5
-  title                                  state latitude longitude classification
-  &lt;chr&gt;                                  &lt;chr&gt;    &lt;dbl&gt;     &lt;dbl&gt; &lt;chr&gt;         
-1 &lt;NA&gt;                                   Alab…     NA        NA   Class B       
-2 &lt;NA&gt;                                   Alas…     NA        NA   Class A       
-3 Report 6496: Bicycling student has ni… Rhod…     41.4     -71.5 Class A       
-4 &lt;NA&gt;                                   Penn…     NA        NA   Class B       
-5 &lt;NA&gt;                                   Oreg…     NA        NA   Class B       
-6 Report 9765: Motorist and children ha… Okla…     35.3     -99.2 Class A       </a:t>
+  title                   state latitude longitude classification
+  &lt;chr&gt;                   &lt;chr&gt;    &lt;dbl&gt;     &lt;dbl&gt; &lt;chr&gt;         
+1 &lt;NA&gt;                    Alab…     NA        NA   Class B       
+2 &lt;NA&gt;                    Alas…     NA        NA   Class A       
+3 Report 6496: Bicycling… Rhod…     41.4     -71.5 Class A       
+4 &lt;NA&gt;                    Penn…     NA        NA   Class B       
+5 &lt;NA&gt;                    Oreg…     NA        NA   Class B       
+6 Report 9765: Motorist … Okla…     35.3     -99.2 Class A       </a:t>
             </a:r>
           </a:p>
         </p:txBody>

--- a/docs/content/mapping/mapping_lecture.pptx
+++ b/docs/content/mapping/mapping_lecture.pptx
@@ -3366,7 +3366,7 @@
             </a:pPr>
             <a:r>
               <a:rPr/>
-              <a:t>2026-09-23</a:t>
+              <a:t>2026-09-24</a:t>
             </a:r>
           </a:p>
         </p:txBody>

--- a/docs/content/mapping/mapping_lecture.pptx
+++ b/docs/content/mapping/mapping_lecture.pptx
@@ -3366,7 +3366,7 @@
             </a:pPr>
             <a:r>
               <a:rPr/>
-              <a:t>2026-09-24</a:t>
+              <a:t>2026-09-29</a:t>
             </a:r>
           </a:p>
         </p:txBody>

--- a/docs/content/mapping/mapping_lecture.pptx
+++ b/docs/content/mapping/mapping_lecture.pptx
@@ -3366,7 +3366,7 @@
             </a:pPr>
             <a:r>
               <a:rPr/>
-              <a:t>2026-09-29</a:t>
+              <a:t>2026-10-01</a:t>
             </a:r>
           </a:p>
         </p:txBody>

--- a/docs/content/mapping/mapping_lecture.pptx
+++ b/docs/content/mapping/mapping_lecture.pptx
@@ -3366,7 +3366,7 @@
             </a:pPr>
             <a:r>
               <a:rPr/>
-              <a:t>2026-10-01</a:t>
+              <a:t>2026-10-05</a:t>
             </a:r>
           </a:p>
         </p:txBody>
@@ -3770,8 +3770,8 @@
         </p:blipFill>
         <p:spPr bwMode="auto">
           <a:xfrm>
-            <a:off x="127000" y="1562100"/>
-            <a:ext cx="4432300" cy="2730500"/>
+            <a:off x="127000" y="1930400"/>
+            <a:ext cx="4432300" cy="1981200"/>
           </a:xfrm>
           <a:prstGeom prst="rect">
             <a:avLst/>
@@ -4609,7 +4609,7 @@
             </a:r>
             <a:r>
               <a:rPr sz="2000"/>
-              <a:t> Where do you expect the densest cluster of sightings — the Pacific Northwest, the Southeast, the Plains? Commit before it draws.</a:t>
+              <a:t> Densest cluster — Pacific Northwest, Southeast, or Plains? Commit before it draws.</a:t>
             </a:r>
           </a:p>
         </p:txBody>
@@ -5157,8 +5157,8 @@
         </p:blipFill>
         <p:spPr bwMode="auto">
           <a:xfrm>
-            <a:off x="127000" y="1562100"/>
-            <a:ext cx="4432300" cy="2730500"/>
+            <a:off x="127000" y="1930400"/>
+            <a:ext cx="4432300" cy="1981200"/>
           </a:xfrm>
           <a:prstGeom prst="rect">
             <a:avLst/>
@@ -7263,8 +7263,8 @@
         </p:blipFill>
         <p:spPr bwMode="auto">
           <a:xfrm>
-            <a:off x="127000" y="1562100"/>
-            <a:ext cx="4432300" cy="2730500"/>
+            <a:off x="127000" y="1930400"/>
+            <a:ext cx="4432300" cy="1981200"/>
           </a:xfrm>
           <a:prstGeom prst="rect">
             <a:avLst/>
@@ -9059,8 +9059,8 @@
         </p:blipFill>
         <p:spPr bwMode="auto">
           <a:xfrm>
-            <a:off x="127000" y="1562100"/>
-            <a:ext cx="4432300" cy="2730500"/>
+            <a:off x="127000" y="1930400"/>
+            <a:ext cx="4432300" cy="1981200"/>
           </a:xfrm>
           <a:prstGeom prst="rect">
             <a:avLst/>
@@ -10016,7 +10016,7 @@
             <a:pPr lvl="0"/>
             <a:r>
               <a:rPr sz="2000"/>
-              <a:t>A choropleth is easy to accept at face value once it’s drawn — naming the state you expect to be darkest </a:t>
+              <a:t>Naming the state you expect to be darkest </a:t>
             </a:r>
             <a:r>
               <a:rPr sz="2000" i="1"/>
@@ -10024,7 +10024,7 @@
             </a:r>
             <a:r>
               <a:rPr sz="2000"/>
-              <a:t> rendering it is what makes you actually look at the result instead of just admiring it.</a:t>
+              <a:t> it renders is what makes you look at the result instead of admiring it.</a:t>
             </a:r>
           </a:p>
           <a:p>
@@ -10047,24 +10047,14 @@
             </a:r>
             <a:r>
               <a:rPr sz="2000"/>
-              <a:t> are new syntax with a specific argument order; typing them yourself is what keeps </a:t>
-            </a:r>
-            <a:r>
-              <a:rPr sz="2000">
-                <a:latin typeface="Courier"/>
-              </a:rPr>
-              <a:t>coords = c("longitude", "latitude")</a:t>
-            </a:r>
+              <a:t> have a specific argument order — typing them is what makes it stick.</a:t>
+            </a:r>
+          </a:p>
+          <a:p>
+            <a:pPr lvl="0"/>
             <a:r>
               <a:rPr sz="2000"/>
-              <a:t> from becoming a copy-paste habit you never really learned.</a:t>
-            </a:r>
-          </a:p>
-          <a:p>
-            <a:pPr lvl="0"/>
-            <a:r>
-              <a:rPr sz="2000"/>
-              <a:t>Spatial objects, basemaps, joins, and projections each get their own chunk so a CRS mismatch doesn’t get confused with a join-key mismatch later.</a:t>
+              <a:t>Spatial objects, basemaps, joins and projections each get their own chunk, so a CRS mismatch doesn’t get confused with a join-key mismatch.</a:t>
             </a:r>
           </a:p>
         </p:txBody>
@@ -11422,7 +11412,7 @@
             </a:r>
             <a:r>
               <a:rPr sz="2000"/>
-              <a:t> We’re about to turn ~4,600 rows of lat/long into points and plot them with </a:t>
+              <a:t> ~4,600 rows of lat/long, plotted with </a:t>
             </a:r>
             <a:r>
               <a:rPr sz="2000" b="1"/>
@@ -11430,7 +11420,7 @@
             </a:r>
             <a:r>
               <a:rPr sz="2000"/>
-              <a:t>. What shape do you think the cloud of points will make?</a:t>
+              <a:t>. What shape will the cloud of points make?</a:t>
             </a:r>
           </a:p>
         </p:txBody>

--- a/docs/content/mapping/mapping_lecture.pptx
+++ b/docs/content/mapping/mapping_lecture.pptx
@@ -3366,7 +3366,7 @@
             </a:pPr>
             <a:r>
               <a:rPr/>
-              <a:t>2026-10-05</a:t>
+              <a:t>2026-10-08</a:t>
             </a:r>
           </a:p>
         </p:txBody>

--- a/docs/content/mapping/mapping_lecture.pptx
+++ b/docs/content/mapping/mapping_lecture.pptx
@@ -3366,7 +3366,7 @@
             </a:pPr>
             <a:r>
               <a:rPr/>
-              <a:t>2026-10-08</a:t>
+              <a:t>2026-10-09</a:t>
             </a:r>
           </a:p>
         </p:txBody>

--- a/docs/content/mapping/mapping_lecture.pptx
+++ b/docs/content/mapping/mapping_lecture.pptx
@@ -3366,7 +3366,7 @@
             </a:pPr>
             <a:r>
               <a:rPr/>
-              <a:t>2026-10-09</a:t>
+              <a:t>2026-10-19</a:t>
             </a:r>
           </a:p>
         </p:txBody>

--- a/docs/content/mapping/mapping_lecture.pptx
+++ b/docs/content/mapping/mapping_lecture.pptx
@@ -31,7 +31,6 @@
     <p:sldId id="279" r:id="rId25"/>
     <p:sldId id="280" r:id="rId26"/>
     <p:sldId id="281" r:id="rId27"/>
-    <p:sldId id="282" r:id="rId28"/>
   </p:sldIdLst>
   <p:sldSz cx="9144000" cy="5143500" type="screen16x9"/>
   <p:notesSz cx="6858000" cy="9144000"/>
@@ -6163,446 +6162,6 @@
         </p:nvSpPr>
         <p:spPr>
           <a:xfrm>
-            <a:off x="0" y="0"/>
-            <a:ext cx="9144000" cy="602780"/>
-          </a:xfrm>
-          <a:solidFill>
-            <a:srgbClr val="1A1A2E"/>
-          </a:solidFill>
-        </p:spPr>
-        <p:txBody>
-          <a:bodyPr/>
-          <a:lstStyle/>
-          <a:p>
-            <a:pPr lvl="0" indent="0" marL="0">
-              <a:buNone/>
-            </a:pPr>
-            <a:r>
-              <a:rPr/>
-              <a:t>Live Demo — Watch It Break (a blank map)</a:t>
-            </a:r>
-          </a:p>
-        </p:txBody>
-      </p:sp>
-      <p:sp>
-        <p:nvSpPr>
-          <p:cNvPr id="3" name="Content Placeholder 2"/>
-          <p:cNvSpPr>
-            <a:spLocks noGrp="1"/>
-          </p:cNvSpPr>
-          <p:nvPr>
-            <p:ph idx="1" sz="half"/>
-          </p:nvPr>
-        </p:nvSpPr>
-        <p:spPr/>
-        <p:txBody>
-          <a:bodyPr/>
-          <a:lstStyle/>
-          <a:p>
-            <a:pPr lvl="0" indent="0" marL="0">
-              <a:buNone/>
-            </a:pPr>
-            <a:r>
-              <a:rPr/>
-              <a:t>If I </a:t>
-            </a:r>
-            <a:r>
-              <a:rPr b="1"/>
-              <a:t>skip</a:t>
-            </a:r>
-            <a:r>
-              <a:rPr/>
-              <a:t> the lowercase step, the join keys don’t match — </a:t>
-            </a:r>
-            <a:r>
-              <a:rPr>
-                <a:latin typeface="Courier"/>
-              </a:rPr>
-              <a:t>"Washington"</a:t>
-            </a:r>
-            <a:r>
-              <a:rPr/>
-              <a:t> ≠ </a:t>
-            </a:r>
-            <a:r>
-              <a:rPr>
-                <a:latin typeface="Courier"/>
-              </a:rPr>
-              <a:t>"washington"</a:t>
-            </a:r>
-            <a:r>
-              <a:rPr/>
-              <a:t>:</a:t>
-            </a:r>
-          </a:p>
-          <a:p>
-            <a:pPr lvl="0" indent="0">
-              <a:buNone/>
-            </a:pPr>
-            <a:r>
-              <a:rPr>
-                <a:solidFill>
-                  <a:srgbClr val="003B4F"/>
-                </a:solidFill>
-                <a:latin typeface="Courier"/>
-              </a:rPr>
-              <a:t>states_sf </a:t>
-            </a:r>
-            <a:r>
-              <a:rPr>
-                <a:solidFill>
-                  <a:srgbClr val="5E5E5E"/>
-                </a:solidFill>
-                <a:latin typeface="Courier"/>
-              </a:rPr>
-              <a:t>%&gt;%</a:t>
-            </a:r>
-            <a:br/>
-            <a:r>
-              <a:rPr>
-                <a:solidFill>
-                  <a:srgbClr val="003B4F"/>
-                </a:solidFill>
-                <a:latin typeface="Courier"/>
-              </a:rPr>
-              <a:t>  </a:t>
-            </a:r>
-            <a:r>
-              <a:rPr>
-                <a:solidFill>
-                  <a:srgbClr val="4758AB"/>
-                </a:solidFill>
-                <a:latin typeface="Courier"/>
-              </a:rPr>
-              <a:t>mutate</a:t>
-            </a:r>
-            <a:r>
-              <a:rPr>
-                <a:solidFill>
-                  <a:srgbClr val="003B4F"/>
-                </a:solidFill>
-                <a:latin typeface="Courier"/>
-              </a:rPr>
-              <a:t>(</a:t>
-            </a:r>
-            <a:r>
-              <a:rPr>
-                <a:solidFill>
-                  <a:srgbClr val="657422"/>
-                </a:solidFill>
-                <a:latin typeface="Courier"/>
-              </a:rPr>
-              <a:t>state =</a:t>
-            </a:r>
-            <a:r>
-              <a:rPr>
-                <a:solidFill>
-                  <a:srgbClr val="003B4F"/>
-                </a:solidFill>
-                <a:latin typeface="Courier"/>
-              </a:rPr>
-              <a:t> ID) </a:t>
-            </a:r>
-            <a:r>
-              <a:rPr>
-                <a:solidFill>
-                  <a:srgbClr val="5E5E5E"/>
-                </a:solidFill>
-                <a:latin typeface="Courier"/>
-              </a:rPr>
-              <a:t>%&gt;%</a:t>
-            </a:r>
-            <a:br/>
-            <a:r>
-              <a:rPr>
-                <a:solidFill>
-                  <a:srgbClr val="003B4F"/>
-                </a:solidFill>
-                <a:latin typeface="Courier"/>
-              </a:rPr>
-              <a:t>  </a:t>
-            </a:r>
-            <a:r>
-              <a:rPr>
-                <a:solidFill>
-                  <a:srgbClr val="5E5E5E"/>
-                </a:solidFill>
-                <a:latin typeface="Courier"/>
-              </a:rPr>
-              <a:t># "Washington" vs "washington"</a:t>
-            </a:r>
-            <a:br/>
-            <a:r>
-              <a:rPr>
-                <a:solidFill>
-                  <a:srgbClr val="003B4F"/>
-                </a:solidFill>
-                <a:latin typeface="Courier"/>
-              </a:rPr>
-              <a:t>  </a:t>
-            </a:r>
-            <a:r>
-              <a:rPr>
-                <a:solidFill>
-                  <a:srgbClr val="4758AB"/>
-                </a:solidFill>
-                <a:latin typeface="Courier"/>
-              </a:rPr>
-              <a:t>left_join</a:t>
-            </a:r>
-            <a:r>
-              <a:rPr>
-                <a:solidFill>
-                  <a:srgbClr val="003B4F"/>
-                </a:solidFill>
-                <a:latin typeface="Courier"/>
-              </a:rPr>
-              <a:t>(</a:t>
-            </a:r>
-            <a:r>
-              <a:rPr>
-                <a:solidFill>
-                  <a:srgbClr val="4758AB"/>
-                </a:solidFill>
-                <a:latin typeface="Courier"/>
-              </a:rPr>
-              <a:t>count</a:t>
-            </a:r>
-            <a:r>
-              <a:rPr>
-                <a:solidFill>
-                  <a:srgbClr val="003B4F"/>
-                </a:solidFill>
-                <a:latin typeface="Courier"/>
-              </a:rPr>
-              <a:t>(bigfoot_df, state), </a:t>
-            </a:r>
-            <a:r>
-              <a:rPr>
-                <a:solidFill>
-                  <a:srgbClr val="657422"/>
-                </a:solidFill>
-                <a:latin typeface="Courier"/>
-              </a:rPr>
-              <a:t>by =</a:t>
-            </a:r>
-            <a:r>
-              <a:rPr>
-                <a:solidFill>
-                  <a:srgbClr val="003B4F"/>
-                </a:solidFill>
-                <a:latin typeface="Courier"/>
-              </a:rPr>
-              <a:t> </a:t>
-            </a:r>
-            <a:r>
-              <a:rPr>
-                <a:solidFill>
-                  <a:srgbClr val="20794D"/>
-                </a:solidFill>
-                <a:latin typeface="Courier"/>
-              </a:rPr>
-              <a:t>"state"</a:t>
-            </a:r>
-            <a:r>
-              <a:rPr>
-                <a:solidFill>
-                  <a:srgbClr val="003B4F"/>
-                </a:solidFill>
-                <a:latin typeface="Courier"/>
-              </a:rPr>
-              <a:t>)</a:t>
-            </a:r>
-          </a:p>
-          <a:p>
-            <a:pPr lvl="0" indent="0" marL="0">
-              <a:buNone/>
-            </a:pPr>
-            <a:r>
-              <a:rPr/>
-              <a:t>Every state gets </a:t>
-            </a:r>
-            <a:r>
-              <a:rPr>
-                <a:latin typeface="Courier"/>
-              </a:rPr>
-              <a:t>NA</a:t>
-            </a:r>
-            <a:r>
-              <a:rPr/>
-              <a:t> sightings → the whole map renders </a:t>
-            </a:r>
-            <a:r>
-              <a:rPr b="1"/>
-              <a:t>grey</a:t>
-            </a:r>
-            <a:r>
-              <a:rPr/>
-              <a:t>. No error, just a blank choropleth.</a:t>
-            </a:r>
-          </a:p>
-          <a:p>
-            <a:pPr lvl="0" indent="0" marL="0">
-              <a:buNone/>
-            </a:pPr>
-            <a:r>
-              <a:rPr/>
-              <a:t>The fix — make both keys the </a:t>
-            </a:r>
-            <a:r>
-              <a:rPr b="1"/>
-              <a:t>same case</a:t>
-            </a:r>
-            <a:r>
-              <a:rPr/>
-              <a:t> before joining (</a:t>
-            </a:r>
-            <a:r>
-              <a:rPr>
-                <a:latin typeface="Courier"/>
-              </a:rPr>
-              <a:t>str_to_lower()</a:t>
-            </a:r>
-            <a:r>
-              <a:rPr/>
-              <a:t>).</a:t>
-            </a:r>
-          </a:p>
-        </p:txBody>
-      </p:sp>
-      <p:sp>
-        <p:nvSpPr>
-          <p:cNvPr id="4" name="Content Placeholder 3"/>
-          <p:cNvSpPr>
-            <a:spLocks noGrp="1"/>
-          </p:cNvSpPr>
-          <p:nvPr>
-            <p:ph idx="2" sz="half"/>
-          </p:nvPr>
-        </p:nvSpPr>
-        <p:spPr/>
-        <p:txBody>
-          <a:bodyPr/>
-          <a:lstStyle/>
-          <a:p>
-            <a:pPr lvl="0" indent="0" marL="1270000">
-              <a:buNone/>
-            </a:pPr>
-            <a:r>
-              <a:rPr sz="2000" b="1"/>
-              <a:t>Important</a:t>
-            </a:r>
-          </a:p>
-          <a:p>
-            <a:pPr lvl="0" indent="0" marL="1270000">
-              <a:buNone/>
-            </a:pPr>
-            <a:r>
-              <a:rPr sz="2000" b="1"/>
-              <a:t>✅ Why show a blank choropleth?</a:t>
-            </a:r>
-          </a:p>
-          <a:p>
-            <a:pPr lvl="0" indent="0" marL="1270000">
-              <a:buNone/>
-            </a:pPr>
-            <a:r>
-              <a:rPr sz="2000">
-                <a:latin typeface="Courier"/>
-              </a:rPr>
-              <a:t>left_join()</a:t>
-            </a:r>
-            <a:r>
-              <a:rPr sz="2000"/>
-              <a:t> doesn’t know that </a:t>
-            </a:r>
-            <a:r>
-              <a:rPr sz="2000">
-                <a:latin typeface="Courier"/>
-              </a:rPr>
-              <a:t>"Washington"</a:t>
-            </a:r>
-            <a:r>
-              <a:rPr sz="2000"/>
-              <a:t> and </a:t>
-            </a:r>
-            <a:r>
-              <a:rPr sz="2000">
-                <a:latin typeface="Courier"/>
-              </a:rPr>
-              <a:t>"washington"</a:t>
-            </a:r>
-            <a:r>
-              <a:rPr sz="2000"/>
-              <a:t> mean the same state — as far as R is concerned they’re two unrelated strings, so every row fails to match and </a:t>
-            </a:r>
-            <a:r>
-              <a:rPr sz="2000">
-                <a:latin typeface="Courier"/>
-              </a:rPr>
-              <a:t>sightings</a:t>
-            </a:r>
-            <a:r>
-              <a:rPr sz="2000"/>
-              <a:t> comes back </a:t>
-            </a:r>
-            <a:r>
-              <a:rPr sz="2000">
-                <a:latin typeface="Courier"/>
-              </a:rPr>
-              <a:t>NA</a:t>
-            </a:r>
-            <a:r>
-              <a:rPr sz="2000"/>
-              <a:t> everywhere. </a:t>
-            </a:r>
-            <a:r>
-              <a:rPr sz="2000">
-                <a:latin typeface="Courier"/>
-              </a:rPr>
-              <a:t>scale_fill_viridis_c()</a:t>
-            </a:r>
-            <a:r>
-              <a:rPr sz="2000"/>
-              <a:t> then has nothing to shade with, and you get a map that ran without a single error yet shows you nothing. Grey-everywhere is the signature of a key-mismatch, not a code bug.</a:t>
-            </a:r>
-          </a:p>
-        </p:txBody>
-      </p:sp>
-    </p:spTree>
-  </p:cSld>
-</p:sld>
-</file>
-
-<file path=ppt/slides/slide21.xml><?xml version="1.0" encoding="utf-8"?>
-<p:sld xmlns:a="http://schemas.openxmlformats.org/drawingml/2006/main" xmlns:r="http://schemas.openxmlformats.org/officeDocument/2006/relationships" xmlns:p="http://schemas.openxmlformats.org/presentationml/2006/main">
-  <p:cSld>
-    <p:spTree>
-      <p:nvGrpSpPr>
-        <p:cNvPr id="1" name=""/>
-        <p:cNvGrpSpPr/>
-        <p:nvPr/>
-      </p:nvGrpSpPr>
-      <p:grpSpPr>
-        <a:xfrm>
-          <a:off x="0" y="0"/>
-          <a:ext cx="0" cy="0"/>
-          <a:chOff x="0" y="0"/>
-          <a:chExt cx="0" cy="0"/>
-        </a:xfrm>
-      </p:grpSpPr>
-      <p:sp>
-        <p:nvSpPr>
-          <p:cNvPr id="2" name="Title 1"/>
-          <p:cNvSpPr>
-            <a:spLocks noGrp="1"/>
-          </p:cNvSpPr>
-          <p:nvPr>
-            <p:ph type="title"/>
-          </p:nvPr>
-        </p:nvSpPr>
-        <p:spPr>
-          <a:xfrm>
             <a:off x="139485" y="78119"/>
             <a:ext cx="8229600" cy="607682"/>
           </a:xfrm>
@@ -7393,6 +6952,83 @@
 </p:sld>
 </file>
 
+<file path=ppt/slides/slide21.xml><?xml version="1.0" encoding="utf-8"?>
+<p:sld xmlns:a="http://schemas.openxmlformats.org/drawingml/2006/main" xmlns:r="http://schemas.openxmlformats.org/officeDocument/2006/relationships" xmlns:p="http://schemas.openxmlformats.org/presentationml/2006/main">
+  <p:cSld>
+    <p:spTree>
+      <p:nvGrpSpPr>
+        <p:cNvPr id="1" name=""/>
+        <p:cNvGrpSpPr/>
+        <p:nvPr/>
+      </p:nvGrpSpPr>
+      <p:grpSpPr>
+        <a:xfrm>
+          <a:off x="0" y="0"/>
+          <a:ext cx="0" cy="0"/>
+          <a:chOff x="0" y="0"/>
+          <a:chExt cx="0" cy="0"/>
+        </a:xfrm>
+      </p:grpSpPr>
+      <p:sp>
+        <p:nvSpPr>
+          <p:cNvPr id="2" name="Title 1"/>
+          <p:cNvSpPr>
+            <a:spLocks noGrp="1"/>
+          </p:cNvSpPr>
+          <p:nvPr>
+            <p:ph type="title"/>
+          </p:nvPr>
+        </p:nvSpPr>
+        <p:spPr>
+          <a:xfrm>
+            <a:off x="0" y="0"/>
+            <a:ext cx="9144000" cy="582780"/>
+          </a:xfrm>
+        </p:spPr>
+        <p:txBody>
+          <a:bodyPr/>
+          <a:lstStyle/>
+          <a:p>
+            <a:pPr lvl="0" indent="0" marL="0">
+              <a:buNone/>
+            </a:pPr>
+            <a:r>
+              <a:rPr/>
+              <a:t>🛑 Pause — Do Activity Parts 7–9 Now</a:t>
+            </a:r>
+          </a:p>
+        </p:txBody>
+      </p:sp>
+      <p:sp>
+        <p:nvSpPr>
+          <p:cNvPr id="3" name="Content Placeholder 2"/>
+          <p:cNvSpPr>
+            <a:spLocks noGrp="1"/>
+          </p:cNvSpPr>
+          <p:nvPr>
+            <p:ph idx="1"/>
+          </p:nvPr>
+        </p:nvSpPr>
+        <p:spPr/>
+        <p:txBody>
+          <a:bodyPr/>
+          <a:lstStyle/>
+          <a:p>
+            <a:pPr lvl="0" indent="0" marL="0">
+              <a:buNone/>
+            </a:pPr>
+            <a:r>
+              <a:rPr/>
+              <a:t>Count sightings per state, join them to the map, and shade the choropleth. Predict the top state before you run it.</a:t>
+            </a:r>
+          </a:p>
+        </p:txBody>
+      </p:sp>
+    </p:spTree>
+  </p:cSld>
+</p:sld>
+</file>
+
 <file path=ppt/slides/slide22.xml><?xml version="1.0" encoding="utf-8"?>
 <p:sld xmlns:a="http://schemas.openxmlformats.org/drawingml/2006/main" xmlns:r="http://schemas.openxmlformats.org/officeDocument/2006/relationships" xmlns:p="http://schemas.openxmlformats.org/presentationml/2006/main">
   <p:cSld>
@@ -7435,7 +7071,11 @@
             </a:pPr>
             <a:r>
               <a:rPr/>
-              <a:t>🛑 Pause — Do Activity Parts 7–9 Now</a:t>
+              <a:t>🧩 Chunk 4 of 4 · Polish &amp; Explore </a:t>
+            </a:r>
+            <a:r>
+              <a:rPr i="1"/>
+              <a:t>(Day 2)</a:t>
             </a:r>
           </a:p>
         </p:txBody>
@@ -7459,8 +7099,34 @@
               <a:buNone/>
             </a:pPr>
             <a:r>
-              <a:rPr/>
-              <a:t>Count sightings per state, join them to the map, and shade the choropleth. Predict the top state before you run it.</a:t>
+              <a:rPr b="1"/>
+              <a:t>We will cover:</a:t>
+            </a:r>
+            <a:r>
+              <a:rPr/>
+              <a:t> a proper US projection, and a fun exploration — sightings by season.</a:t>
+            </a:r>
+          </a:p>
+          <a:p>
+            <a:pPr lvl="0" indent="0" marL="1270000">
+              <a:buNone/>
+            </a:pPr>
+            <a:r>
+              <a:rPr sz="2000" b="1"/>
+              <a:t>Tip</a:t>
+            </a:r>
+          </a:p>
+          <a:p>
+            <a:pPr lvl="0" indent="0" marL="1270000">
+              <a:buNone/>
+            </a:pPr>
+            <a:r>
+              <a:rPr sz="2000" b="1"/>
+              <a:t>🖐 After this chunk: Activity Parts 10–12</a:t>
+            </a:r>
+            <a:r>
+              <a:rPr sz="2000"/>
+              <a:t> (reproject, then explore).</a:t>
             </a:r>
           </a:p>
         </p:txBody>
@@ -7471,113 +7137,6 @@
 </file>
 
 <file path=ppt/slides/slide23.xml><?xml version="1.0" encoding="utf-8"?>
-<p:sld xmlns:a="http://schemas.openxmlformats.org/drawingml/2006/main" xmlns:r="http://schemas.openxmlformats.org/officeDocument/2006/relationships" xmlns:p="http://schemas.openxmlformats.org/presentationml/2006/main">
-  <p:cSld>
-    <p:spTree>
-      <p:nvGrpSpPr>
-        <p:cNvPr id="1" name=""/>
-        <p:cNvGrpSpPr/>
-        <p:nvPr/>
-      </p:nvGrpSpPr>
-      <p:grpSpPr>
-        <a:xfrm>
-          <a:off x="0" y="0"/>
-          <a:ext cx="0" cy="0"/>
-          <a:chOff x="0" y="0"/>
-          <a:chExt cx="0" cy="0"/>
-        </a:xfrm>
-      </p:grpSpPr>
-      <p:sp>
-        <p:nvSpPr>
-          <p:cNvPr id="2" name="Title 1"/>
-          <p:cNvSpPr>
-            <a:spLocks noGrp="1"/>
-          </p:cNvSpPr>
-          <p:nvPr>
-            <p:ph type="title"/>
-          </p:nvPr>
-        </p:nvSpPr>
-        <p:spPr>
-          <a:xfrm>
-            <a:off x="0" y="0"/>
-            <a:ext cx="9144000" cy="582780"/>
-          </a:xfrm>
-        </p:spPr>
-        <p:txBody>
-          <a:bodyPr/>
-          <a:lstStyle/>
-          <a:p>
-            <a:pPr lvl="0" indent="0" marL="0">
-              <a:buNone/>
-            </a:pPr>
-            <a:r>
-              <a:rPr/>
-              <a:t>🧩 Chunk 4 of 4 · Polish &amp; Explore </a:t>
-            </a:r>
-            <a:r>
-              <a:rPr i="1"/>
-              <a:t>(Day 2)</a:t>
-            </a:r>
-          </a:p>
-        </p:txBody>
-      </p:sp>
-      <p:sp>
-        <p:nvSpPr>
-          <p:cNvPr id="3" name="Content Placeholder 2"/>
-          <p:cNvSpPr>
-            <a:spLocks noGrp="1"/>
-          </p:cNvSpPr>
-          <p:nvPr>
-            <p:ph idx="1"/>
-          </p:nvPr>
-        </p:nvSpPr>
-        <p:spPr/>
-        <p:txBody>
-          <a:bodyPr/>
-          <a:lstStyle/>
-          <a:p>
-            <a:pPr lvl="0" indent="0" marL="0">
-              <a:buNone/>
-            </a:pPr>
-            <a:r>
-              <a:rPr b="1"/>
-              <a:t>We will cover:</a:t>
-            </a:r>
-            <a:r>
-              <a:rPr/>
-              <a:t> a proper US projection, and a fun exploration — sightings by season.</a:t>
-            </a:r>
-          </a:p>
-          <a:p>
-            <a:pPr lvl="0" indent="0" marL="1270000">
-              <a:buNone/>
-            </a:pPr>
-            <a:r>
-              <a:rPr sz="2000" b="1"/>
-              <a:t>Tip</a:t>
-            </a:r>
-          </a:p>
-          <a:p>
-            <a:pPr lvl="0" indent="0" marL="1270000">
-              <a:buNone/>
-            </a:pPr>
-            <a:r>
-              <a:rPr sz="2000" b="1"/>
-              <a:t>🖐 After this chunk: Activity Parts 10–12</a:t>
-            </a:r>
-            <a:r>
-              <a:rPr sz="2000"/>
-              <a:t> (reproject, then explore).</a:t>
-            </a:r>
-          </a:p>
-        </p:txBody>
-      </p:sp>
-    </p:spTree>
-  </p:cSld>
-</p:sld>
-</file>
-
-<file path=ppt/slides/slide24.xml><?xml version="1.0" encoding="utf-8"?>
 <p:sld xmlns:a="http://schemas.openxmlformats.org/drawingml/2006/main" xmlns:r="http://schemas.openxmlformats.org/officeDocument/2006/relationships" xmlns:p="http://schemas.openxmlformats.org/presentationml/2006/main">
   <p:cSld>
     <p:spTree>
@@ -8277,7 +7836,7 @@
 </p:sld>
 </file>
 
-<file path=ppt/slides/slide25.xml><?xml version="1.0" encoding="utf-8"?>
+<file path=ppt/slides/slide24.xml><?xml version="1.0" encoding="utf-8"?>
 <p:sld xmlns:a="http://schemas.openxmlformats.org/drawingml/2006/main" xmlns:r="http://schemas.openxmlformats.org/officeDocument/2006/relationships" xmlns:p="http://schemas.openxmlformats.org/presentationml/2006/main">
   <p:cSld>
     <p:spTree>
@@ -8367,7 +7926,7 @@
 </p:sld>
 </file>
 
-<file path=ppt/slides/slide26.xml><?xml version="1.0" encoding="utf-8"?>
+<file path=ppt/slides/slide25.xml><?xml version="1.0" encoding="utf-8"?>
 <p:sld xmlns:a="http://schemas.openxmlformats.org/drawingml/2006/main" xmlns:r="http://schemas.openxmlformats.org/officeDocument/2006/relationships" xmlns:p="http://schemas.openxmlformats.org/presentationml/2006/main">
   <p:cSld>
     <p:spTree>
@@ -9129,7 +8688,7 @@
 </p:sld>
 </file>
 
-<file path=ppt/slides/slide27.xml><?xml version="1.0" encoding="utf-8"?>
+<file path=ppt/slides/slide26.xml><?xml version="1.0" encoding="utf-8"?>
 <p:sld xmlns:a="http://schemas.openxmlformats.org/drawingml/2006/main" xmlns:r="http://schemas.openxmlformats.org/officeDocument/2006/relationships" xmlns:p="http://schemas.openxmlformats.org/presentationml/2006/main">
   <p:cSld>
     <p:spTree>

--- a/docs/content/mapping/mapping_lecture.pptx
+++ b/docs/content/mapping/mapping_lecture.pptx
@@ -3365,7 +3365,7 @@
             </a:pPr>
             <a:r>
               <a:rPr/>
-              <a:t>2026-10-19</a:t>
+              <a:t>2026-10-22</a:t>
             </a:r>
           </a:p>
         </p:txBody>
